--- a/Cloud Computing Basic.pptx
+++ b/Cloud Computing Basic.pptx
@@ -7512,23 +7512,6 @@
               </a:rPr>
               <a:t> </a:t>
             </a:r>
-            <a:r>
-              <a:rPr lang="en-GB" b="0" noProof="0" dirty="0">
-                <a:solidFill>
-                  <a:srgbClr val="A31515"/>
-                </a:solidFill>
-                <a:effectLst/>
-                <a:latin typeface="Consolas" panose="020B0609020204030204" pitchFamily="49" charset="0"/>
-              </a:rPr>
-              <a:t>–d</a:t>
-            </a:r>
-            <a:endParaRPr lang="en-GB" b="0" noProof="0" dirty="0">
-              <a:solidFill>
-                <a:srgbClr val="000000"/>
-              </a:solidFill>
-              <a:effectLst/>
-              <a:latin typeface="Consolas" panose="020B0609020204030204" pitchFamily="49" charset="0"/>
-            </a:endParaRPr>
           </a:p>
         </p:txBody>
       </p:sp>
@@ -7617,8 +7600,8 @@
         </p:nvSpPr>
         <p:spPr>
           <a:xfrm>
-            <a:off x="4103404" y="4511975"/>
-            <a:ext cx="4702969" cy="286360"/>
+            <a:off x="4405990" y="4455518"/>
+            <a:ext cx="2854973" cy="286360"/>
           </a:xfrm>
           <a:prstGeom prst="rect">
             <a:avLst/>
@@ -7637,6 +7620,25 @@
               </a:lnSpc>
             </a:pPr>
             <a:r>
+              <a:rPr lang="en-GB" dirty="0">
+                <a:solidFill>
+                  <a:srgbClr val="000000"/>
+                </a:solidFill>
+                <a:latin typeface="Consolas" panose="020B0609020204030204" pitchFamily="49" charset="0"/>
+              </a:rPr>
+              <a:t>d</a:t>
+            </a:r>
+            <a:r>
+              <a:rPr lang="en-GB" b="0" noProof="0" dirty="0" err="1">
+                <a:solidFill>
+                  <a:srgbClr val="000000"/>
+                </a:solidFill>
+                <a:effectLst/>
+                <a:latin typeface="Consolas" panose="020B0609020204030204" pitchFamily="49" charset="0"/>
+              </a:rPr>
+              <a:t>ocker</a:t>
+            </a:r>
+            <a:r>
               <a:rPr lang="en-GB" b="0" noProof="0" dirty="0">
                 <a:solidFill>
                   <a:srgbClr val="000000"/>
@@ -7644,7 +7646,7 @@
                 <a:effectLst/>
                 <a:latin typeface="Consolas" panose="020B0609020204030204" pitchFamily="49" charset="0"/>
               </a:rPr>
-              <a:t>docker </a:t>
+              <a:t>-compose </a:t>
             </a:r>
             <a:r>
               <a:rPr lang="en-GB" b="0" noProof="0" dirty="0">
@@ -7654,67 +7656,7 @@
                 <a:effectLst/>
                 <a:latin typeface="Consolas" panose="020B0609020204030204" pitchFamily="49" charset="0"/>
               </a:rPr>
-              <a:t>exec</a:t>
-            </a:r>
-            <a:r>
-              <a:rPr lang="en-GB" b="0" noProof="0" dirty="0">
-                <a:solidFill>
-                  <a:srgbClr val="000000"/>
-                </a:solidFill>
-                <a:effectLst/>
-                <a:latin typeface="Consolas" panose="020B0609020204030204" pitchFamily="49" charset="0"/>
-              </a:rPr>
-              <a:t> </a:t>
-            </a:r>
-            <a:r>
-              <a:rPr lang="en-GB" b="0" noProof="0" dirty="0">
-                <a:solidFill>
-                  <a:srgbClr val="A31515"/>
-                </a:solidFill>
-                <a:effectLst/>
-                <a:latin typeface="Consolas" panose="020B0609020204030204" pitchFamily="49" charset="0"/>
-              </a:rPr>
-              <a:t>-it</a:t>
-            </a:r>
-            <a:r>
-              <a:rPr lang="en-GB" b="0" noProof="0" dirty="0">
-                <a:solidFill>
-                  <a:srgbClr val="000000"/>
-                </a:solidFill>
-                <a:effectLst/>
-                <a:latin typeface="Consolas" panose="020B0609020204030204" pitchFamily="49" charset="0"/>
-              </a:rPr>
-              <a:t> </a:t>
-            </a:r>
-            <a:r>
-              <a:rPr lang="en-GB" b="0" noProof="0" dirty="0">
-                <a:solidFill>
-                  <a:srgbClr val="A31515"/>
-                </a:solidFill>
-                <a:effectLst/>
-                <a:latin typeface="Consolas" panose="020B0609020204030204" pitchFamily="49" charset="0"/>
-              </a:rPr>
-              <a:t>Master</a:t>
-            </a:r>
-            <a:r>
-              <a:rPr lang="en-GB" b="0" noProof="0" dirty="0">
-                <a:solidFill>
-                  <a:srgbClr val="000000"/>
-                </a:solidFill>
-                <a:effectLst/>
-                <a:latin typeface="Consolas" panose="020B0609020204030204" pitchFamily="49" charset="0"/>
-              </a:rPr>
-              <a:t> </a:t>
-            </a:r>
-            <a:r>
-              <a:rPr lang="en-GB" b="0" noProof="0" dirty="0">
-                <a:solidFill>
-                  <a:srgbClr val="A31515"/>
-                </a:solidFill>
-                <a:effectLst/>
-                <a:latin typeface="Consolas" panose="020B0609020204030204" pitchFamily="49" charset="0"/>
-              </a:rPr>
-              <a:t>bash</a:t>
+              <a:t>up -d</a:t>
             </a:r>
             <a:endParaRPr lang="en-GB" b="0" noProof="0" dirty="0">
               <a:solidFill>
